--- a/cw1/docs/cw1 pre.pptx
+++ b/cw1/docs/cw1 pre.pptx
@@ -3219,6 +3219,45 @@
               <a:t>2024 – 2025  Academic Year</a:t>
             </a:r>
             <a:endParaRPr lang="en-US" sz="1000" dirty="0"/>
+          </a:p>
+        </p:txBody>
+      </p:sp>
+      <p:sp>
+        <p:nvSpPr>
+          <p:cNvPr id="12" name="文本框 11">
+            <a:extLst>
+              <a:ext uri="{FF2B5EF4-FFF2-40B4-BE49-F238E27FC236}">
+                <a16:creationId xmlns:a16="http://schemas.microsoft.com/office/drawing/2014/main" id="{035CDF3E-A559-5183-376A-83B16DAAAEE9}"/>
+              </a:ext>
+            </a:extLst>
+          </p:cNvPr>
+          <p:cNvSpPr txBox="1"/>
+          <p:nvPr/>
+        </p:nvSpPr>
+        <p:spPr>
+          <a:xfrm>
+            <a:off x="1125415" y="2267712"/>
+            <a:ext cx="4572000" cy="369332"/>
+          </a:xfrm>
+          <a:prstGeom prst="rect">
+            <a:avLst/>
+          </a:prstGeom>
+          <a:noFill/>
+        </p:spPr>
+        <p:txBody>
+          <a:bodyPr wrap="square">
+            <a:spAutoFit/>
+          </a:bodyPr>
+          <a:lstStyle/>
+          <a:p>
+            <a:r>
+              <a:rPr lang="zh-CN" altLang="en-US" dirty="0">
+                <a:solidFill>
+                  <a:schemeClr val="bg1"/>
+                </a:solidFill>
+              </a:rPr>
+              <a:t>https://caoyuchen688.pythonanywhere.com/</a:t>
+            </a:r>
           </a:p>
         </p:txBody>
       </p:sp>
